--- a/media/resources/files/0Template_JPcrhyQ.pptx
+++ b/media/resources/files/0Template_JPcrhyQ.pptx
@@ -4438,7 +4438,7 @@
             </a:pPr>
             <a:r>
               <a:rPr lang="ru-RU" dirty="0"/>
-              <a:t>Турдуу пикирлер учун ыраазычылык билдиребиз.</a:t>
+              <a:t>Түрдүү пикирлер үчүн ыраазычылык билдиребиз.</a:t>
             </a:r>
           </a:p>
           <a:p>

--- a/media/resources/files/0Template_JPcrhyQ.pptx
+++ b/media/resources/files/0Template_JPcrhyQ.pptx
@@ -3935,7 +3935,7 @@
           <a:p>
             <a:r>
               <a:rPr lang="ru-RU" dirty="0"/>
-              <a:t>Бул ресурс математикалык ыкманын жандуу демонстрацияларын камсыз кылат.</a:t>
+              <a:t>Бул ресурс ыкманы жандуу көрсөтөт.</a:t>
             </a:r>
           </a:p>
           <a:p>
